--- a/aero-tech-stack.pptx
+++ b/aero-tech-stack.pptx
@@ -2636,7 +2636,7 @@
               <a:buNone/>
             </a:pPr>
             <a:r>
-              <a:rPr lang="en-US" sz="1300" dirty="0">
+              <a:rPr lang="pl-PL" sz="1300" dirty="0">
                 <a:solidFill>
                   <a:srgbClr val="94A3B8"/>
                 </a:solidFill>
@@ -2644,9 +2644,27 @@
                 <a:ea typeface="Calibri" pitchFamily="34" charset="-122"/>
                 <a:cs typeface="Calibri" pitchFamily="34" charset="-120"/>
               </a:rPr>
-              <a:t>Dwuwarstwowa architektura: SPA Frontend komunikujący się z REST API przez HTTP/JSON</a:t>
-            </a:r>
-            <a:endParaRPr lang="en-US" sz="1300" dirty="0"/>
+              <a:t>Trójwarstwowa</a:t>
+            </a:r>
+            <a:r>
+              <a:rPr lang="en-US" sz="1300" dirty="0">
+                <a:solidFill>
+                  <a:srgbClr val="94A3B8"/>
+                </a:solidFill>
+                <a:latin typeface="Calibri" pitchFamily="34" charset="0"/>
+                <a:ea typeface="Calibri" pitchFamily="34" charset="-122"/>
+                <a:cs typeface="Calibri" pitchFamily="34" charset="-120"/>
+              </a:rPr>
+              <a:t> architektura: SPA Frontend komunikujący się z REST API przez HTTP/JSON</a:t>
+            </a:r>
+            <a:endParaRPr lang="pl-PL" sz="1300" dirty="0">
+              <a:solidFill>
+                <a:srgbClr val="94A3B8"/>
+              </a:solidFill>
+              <a:latin typeface="Calibri" pitchFamily="34" charset="0"/>
+              <a:ea typeface="Calibri" pitchFamily="34" charset="-122"/>
+              <a:cs typeface="Calibri" pitchFamily="34" charset="-120"/>
+            </a:endParaRPr>
           </a:p>
         </p:txBody>
       </p:sp>
